--- a/examples/validation/recipes.warm.pptx
+++ b/examples/validation/recipes.warm.pptx
@@ -17178,55 +17178,573 @@
       </p:sp>
       <p:sp>
         <p:nvSpPr>
-          <p:cNvPr id="7" name="TextBox 6"/>
-          <p:cNvSpPr txBox="1"/>
-          <p:nvPr/>
-        </p:nvSpPr>
-        <p:spPr>
-          <a:xfrm>
-            <a:off x="959061" y="1598852"/>
-            <a:ext cx="3405993" cy="2771533"/>
-          </a:xfrm>
-          <a:prstGeom prst="rect">
-            <a:avLst/>
-          </a:prstGeom>
-          <a:noFill/>
-        </p:spPr>
-        <p:txBody>
-          <a:bodyPr wrap="square" lIns="0" rIns="0" tIns="0" bIns="0">
-            <a:normAutofit/>
-          </a:bodyPr>
-          <a:lstStyle/>
-          <a:p>
+          <p:cNvPr id="7" name="Rectangle 6"/>
+          <p:cNvSpPr/>
+          <p:nvPr/>
+        </p:nvSpPr>
+        <p:spPr>
+          <a:xfrm>
+            <a:off x="1524633" y="2029042"/>
+            <a:ext cx="4061445" cy="2707630"/>
+          </a:xfrm>
+          <a:prstGeom prst="rect">
+            <a:avLst/>
+          </a:prstGeom>
+          <a:noFill/>
+          <a:ln w="14288">
+            <a:solidFill>
+              <a:srgbClr val="67E8F9"/>
+            </a:solidFill>
+          </a:ln>
+        </p:spPr>
+        <p:style>
+          <a:lnRef idx="1">
+            <a:schemeClr val="accent1"/>
+          </a:lnRef>
+          <a:fillRef idx="3">
+            <a:schemeClr val="accent1"/>
+          </a:fillRef>
+          <a:effectRef idx="2">
+            <a:schemeClr val="accent1"/>
+          </a:effectRef>
+          <a:fontRef idx="minor">
+            <a:schemeClr val="lt1"/>
+          </a:fontRef>
+        </p:style>
+        <p:txBody>
+          <a:bodyPr rtlCol="0" anchor="ctr"/>
+          <a:lstStyle/>
+          <a:p>
+            <a:pPr algn="ctr"/>
             <a:endParaRPr lang="en-US"/>
           </a:p>
         </p:txBody>
       </p:sp>
       <p:sp>
         <p:nvSpPr>
-          <p:cNvPr id="8" name="TextBox 7"/>
-          <p:cNvSpPr txBox="1"/>
-          <p:nvPr/>
-        </p:nvSpPr>
-        <p:spPr>
-          <a:xfrm>
-            <a:off x="2745656" y="3050964"/>
-            <a:ext cx="1619399" cy="276225"/>
-          </a:xfrm>
-          <a:prstGeom prst="rect">
-            <a:avLst/>
-          </a:prstGeom>
-          <a:noFill/>
-        </p:spPr>
-        <p:txBody>
-          <a:bodyPr wrap="none" lIns="0" rIns="0" tIns="0" bIns="0">
-            <a:spAutoFit/>
-          </a:bodyPr>
-          <a:lstStyle/>
-          <a:p>
-            <a:pPr algn="l"/>
-            <a:r>
-              <a:rPr sz="1650" b="1" i="0" u="none">
+          <p:cNvPr id="8" name="Rectangle 7"/>
+          <p:cNvSpPr/>
+          <p:nvPr/>
+        </p:nvSpPr>
+        <p:spPr>
+          <a:xfrm>
+            <a:off x="1975904" y="2480314"/>
+            <a:ext cx="3158902" cy="1353815"/>
+          </a:xfrm>
+          <a:prstGeom prst="rect">
+            <a:avLst/>
+          </a:prstGeom>
+          <a:noFill/>
+          <a:ln w="19050">
+            <a:solidFill>
+              <a:srgbClr val="67E8F9"/>
+            </a:solidFill>
+          </a:ln>
+        </p:spPr>
+        <p:style>
+          <a:lnRef idx="1">
+            <a:schemeClr val="accent1"/>
+          </a:lnRef>
+          <a:fillRef idx="3">
+            <a:schemeClr val="accent1"/>
+          </a:fillRef>
+          <a:effectRef idx="2">
+            <a:schemeClr val="accent1"/>
+          </a:effectRef>
+          <a:fontRef idx="minor">
+            <a:schemeClr val="lt1"/>
+          </a:fontRef>
+        </p:style>
+        <p:txBody>
+          <a:bodyPr rtlCol="0" anchor="ctr"/>
+          <a:lstStyle/>
+          <a:p>
+            <a:pPr algn="ctr"/>
+            <a:endParaRPr lang="en-US"/>
+          </a:p>
+        </p:txBody>
+      </p:sp>
+      <p:sp>
+        <p:nvSpPr>
+          <p:cNvPr id="9" name="Rounded Rectangle 8"/>
+          <p:cNvSpPr/>
+          <p:nvPr/>
+        </p:nvSpPr>
+        <p:spPr>
+          <a:xfrm>
+            <a:off x="1975904" y="4059765"/>
+            <a:ext cx="1353815" cy="451272"/>
+          </a:xfrm>
+          <a:prstGeom prst="roundRect">
+            <a:avLst/>
+          </a:prstGeom>
+          <a:solidFill>
+            <a:srgbClr val="67E8F9"/>
+          </a:solidFill>
+          <a:ln>
+            <a:noFill/>
+          </a:ln>
+        </p:spPr>
+        <p:style>
+          <a:lnRef idx="1">
+            <a:schemeClr val="accent1"/>
+          </a:lnRef>
+          <a:fillRef idx="3">
+            <a:schemeClr val="accent1"/>
+          </a:fillRef>
+          <a:effectRef idx="2">
+            <a:schemeClr val="accent1"/>
+          </a:effectRef>
+          <a:fontRef idx="minor">
+            <a:schemeClr val="lt1"/>
+          </a:fontRef>
+        </p:style>
+        <p:txBody>
+          <a:bodyPr rtlCol="0" anchor="ctr"/>
+          <a:lstStyle/>
+          <a:p>
+            <a:pPr algn="ctr"/>
+            <a:endParaRPr lang="en-US"/>
+          </a:p>
+        </p:txBody>
+      </p:sp>
+      <p:sp>
+        <p:nvSpPr>
+          <p:cNvPr id="10" name="Rounded Rectangle 9"/>
+          <p:cNvSpPr/>
+          <p:nvPr/>
+        </p:nvSpPr>
+        <p:spPr>
+          <a:xfrm>
+            <a:off x="1975904" y="4059765"/>
+            <a:ext cx="1353815" cy="451272"/>
+          </a:xfrm>
+          <a:prstGeom prst="roundRect">
+            <a:avLst/>
+          </a:prstGeom>
+          <a:noFill/>
+          <a:ln w="14288">
+            <a:solidFill>
+              <a:srgbClr val="67E8F9"/>
+            </a:solidFill>
+          </a:ln>
+        </p:spPr>
+        <p:style>
+          <a:lnRef idx="1">
+            <a:schemeClr val="accent1"/>
+          </a:lnRef>
+          <a:fillRef idx="3">
+            <a:schemeClr val="accent1"/>
+          </a:fillRef>
+          <a:effectRef idx="2">
+            <a:schemeClr val="accent1"/>
+          </a:effectRef>
+          <a:fontRef idx="minor">
+            <a:schemeClr val="lt1"/>
+          </a:fontRef>
+        </p:style>
+        <p:txBody>
+          <a:bodyPr rtlCol="0" anchor="ctr"/>
+          <a:lstStyle/>
+          <a:p>
+            <a:pPr algn="ctr"/>
+            <a:endParaRPr lang="en-US"/>
+          </a:p>
+        </p:txBody>
+      </p:sp>
+      <p:cxnSp>
+        <p:nvCxnSpPr>
+          <p:cNvPr id="11" name="Connector 10"/>
+          <p:cNvCxnSpPr/>
+          <p:nvPr/>
+        </p:nvCxnSpPr>
+        <p:spPr>
+          <a:xfrm>
+            <a:off x="1524633" y="1803406"/>
+            <a:ext cx="4061445" cy="0"/>
+          </a:xfrm>
+          <a:prstGeom prst="line">
+            <a:avLst/>
+          </a:prstGeom>
+          <a:ln w="9525">
+            <a:solidFill>
+              <a:srgbClr val="67E8F9"/>
+            </a:solidFill>
+          </a:ln>
+        </p:spPr>
+        <p:style>
+          <a:lnRef idx="2">
+            <a:schemeClr val="accent1"/>
+          </a:lnRef>
+          <a:fillRef idx="0">
+            <a:schemeClr val="accent1"/>
+          </a:fillRef>
+          <a:effectRef idx="1">
+            <a:schemeClr val="accent1"/>
+          </a:effectRef>
+          <a:fontRef idx="minor">
+            <a:schemeClr val="tx1"/>
+          </a:fontRef>
+        </p:style>
+      </p:cxnSp>
+      <p:cxnSp>
+        <p:nvCxnSpPr>
+          <p:cNvPr id="12" name="Connector 11"/>
+          <p:cNvCxnSpPr/>
+          <p:nvPr/>
+        </p:nvCxnSpPr>
+        <p:spPr>
+          <a:xfrm>
+            <a:off x="1524633" y="1735715"/>
+            <a:ext cx="0" cy="135382"/>
+          </a:xfrm>
+          <a:prstGeom prst="line">
+            <a:avLst/>
+          </a:prstGeom>
+          <a:ln w="9525">
+            <a:solidFill>
+              <a:srgbClr val="67E8F9"/>
+            </a:solidFill>
+          </a:ln>
+        </p:spPr>
+        <p:style>
+          <a:lnRef idx="2">
+            <a:schemeClr val="accent1"/>
+          </a:lnRef>
+          <a:fillRef idx="0">
+            <a:schemeClr val="accent1"/>
+          </a:fillRef>
+          <a:effectRef idx="1">
+            <a:schemeClr val="accent1"/>
+          </a:effectRef>
+          <a:fontRef idx="minor">
+            <a:schemeClr val="tx1"/>
+          </a:fontRef>
+        </p:style>
+      </p:cxnSp>
+      <p:cxnSp>
+        <p:nvCxnSpPr>
+          <p:cNvPr id="13" name="Connector 12"/>
+          <p:cNvCxnSpPr/>
+          <p:nvPr/>
+        </p:nvCxnSpPr>
+        <p:spPr>
+          <a:xfrm>
+            <a:off x="5586078" y="1735715"/>
+            <a:ext cx="0" cy="135382"/>
+          </a:xfrm>
+          <a:prstGeom prst="line">
+            <a:avLst/>
+          </a:prstGeom>
+          <a:ln w="9525">
+            <a:solidFill>
+              <a:srgbClr val="67E8F9"/>
+            </a:solidFill>
+          </a:ln>
+        </p:spPr>
+        <p:style>
+          <a:lnRef idx="2">
+            <a:schemeClr val="accent1"/>
+          </a:lnRef>
+          <a:fillRef idx="0">
+            <a:schemeClr val="accent1"/>
+          </a:fillRef>
+          <a:effectRef idx="1">
+            <a:schemeClr val="accent1"/>
+          </a:effectRef>
+          <a:fontRef idx="minor">
+            <a:schemeClr val="tx1"/>
+          </a:fontRef>
+        </p:style>
+      </p:cxnSp>
+      <p:cxnSp>
+        <p:nvCxnSpPr>
+          <p:cNvPr id="14" name="Connector 13"/>
+          <p:cNvCxnSpPr/>
+          <p:nvPr/>
+        </p:nvCxnSpPr>
+        <p:spPr>
+          <a:xfrm>
+            <a:off x="1298997" y="2029042"/>
+            <a:ext cx="0" cy="2707630"/>
+          </a:xfrm>
+          <a:prstGeom prst="line">
+            <a:avLst/>
+          </a:prstGeom>
+          <a:ln w="9525">
+            <a:solidFill>
+              <a:srgbClr val="67E8F9"/>
+            </a:solidFill>
+          </a:ln>
+        </p:spPr>
+        <p:style>
+          <a:lnRef idx="2">
+            <a:schemeClr val="accent1"/>
+          </a:lnRef>
+          <a:fillRef idx="0">
+            <a:schemeClr val="accent1"/>
+          </a:fillRef>
+          <a:effectRef idx="1">
+            <a:schemeClr val="accent1"/>
+          </a:effectRef>
+          <a:fontRef idx="minor">
+            <a:schemeClr val="tx1"/>
+          </a:fontRef>
+        </p:style>
+      </p:cxnSp>
+      <p:cxnSp>
+        <p:nvCxnSpPr>
+          <p:cNvPr id="15" name="Connector 14"/>
+          <p:cNvCxnSpPr/>
+          <p:nvPr/>
+        </p:nvCxnSpPr>
+        <p:spPr>
+          <a:xfrm>
+            <a:off x="1231306" y="2029042"/>
+            <a:ext cx="135381" cy="0"/>
+          </a:xfrm>
+          <a:prstGeom prst="line">
+            <a:avLst/>
+          </a:prstGeom>
+          <a:ln w="9525">
+            <a:solidFill>
+              <a:srgbClr val="67E8F9"/>
+            </a:solidFill>
+          </a:ln>
+        </p:spPr>
+        <p:style>
+          <a:lnRef idx="2">
+            <a:schemeClr val="accent1"/>
+          </a:lnRef>
+          <a:fillRef idx="0">
+            <a:schemeClr val="accent1"/>
+          </a:fillRef>
+          <a:effectRef idx="1">
+            <a:schemeClr val="accent1"/>
+          </a:effectRef>
+          <a:fontRef idx="minor">
+            <a:schemeClr val="tx1"/>
+          </a:fontRef>
+        </p:style>
+      </p:cxnSp>
+      <p:cxnSp>
+        <p:nvCxnSpPr>
+          <p:cNvPr id="16" name="Connector 15"/>
+          <p:cNvCxnSpPr/>
+          <p:nvPr/>
+        </p:nvCxnSpPr>
+        <p:spPr>
+          <a:xfrm>
+            <a:off x="1231306" y="4736672"/>
+            <a:ext cx="135381" cy="0"/>
+          </a:xfrm>
+          <a:prstGeom prst="line">
+            <a:avLst/>
+          </a:prstGeom>
+          <a:ln w="9525">
+            <a:solidFill>
+              <a:srgbClr val="67E8F9"/>
+            </a:solidFill>
+          </a:ln>
+        </p:spPr>
+        <p:style>
+          <a:lnRef idx="2">
+            <a:schemeClr val="accent1"/>
+          </a:lnRef>
+          <a:fillRef idx="0">
+            <a:schemeClr val="accent1"/>
+          </a:fillRef>
+          <a:effectRef idx="1">
+            <a:schemeClr val="accent1"/>
+          </a:effectRef>
+          <a:fontRef idx="minor">
+            <a:schemeClr val="tx1"/>
+          </a:fontRef>
+        </p:style>
+      </p:cxnSp>
+      <p:sp>
+        <p:nvSpPr>
+          <p:cNvPr id="17" name="Oval 16"/>
+          <p:cNvSpPr/>
+          <p:nvPr/>
+        </p:nvSpPr>
+        <p:spPr>
+          <a:xfrm>
+            <a:off x="657225" y="1161635"/>
+            <a:ext cx="381000" cy="381000"/>
+          </a:xfrm>
+          <a:prstGeom prst="ellipse">
+            <a:avLst/>
+          </a:prstGeom>
+          <a:noFill/>
+          <a:ln w="9525">
+            <a:solidFill>
+              <a:srgbClr val="A78BFA"/>
+            </a:solidFill>
+          </a:ln>
+        </p:spPr>
+        <p:style>
+          <a:lnRef idx="1">
+            <a:schemeClr val="accent1"/>
+          </a:lnRef>
+          <a:fillRef idx="3">
+            <a:schemeClr val="accent1"/>
+          </a:fillRef>
+          <a:effectRef idx="2">
+            <a:schemeClr val="accent1"/>
+          </a:effectRef>
+          <a:fontRef idx="minor">
+            <a:schemeClr val="lt1"/>
+          </a:fontRef>
+        </p:style>
+        <p:txBody>
+          <a:bodyPr rtlCol="0" anchor="ctr"/>
+          <a:lstStyle/>
+          <a:p>
+            <a:pPr algn="ctr"/>
+            <a:endParaRPr lang="en-US"/>
+          </a:p>
+        </p:txBody>
+      </p:sp>
+      <p:sp>
+        <p:nvSpPr>
+          <p:cNvPr id="18" name="Oval 17"/>
+          <p:cNvSpPr/>
+          <p:nvPr/>
+        </p:nvSpPr>
+        <p:spPr>
+          <a:xfrm>
+            <a:off x="752475" y="1256885"/>
+            <a:ext cx="190500" cy="190500"/>
+          </a:xfrm>
+          <a:prstGeom prst="ellipse">
+            <a:avLst/>
+          </a:prstGeom>
+          <a:noFill/>
+          <a:ln w="9525">
+            <a:solidFill>
+              <a:srgbClr val="A78BFA"/>
+            </a:solidFill>
+          </a:ln>
+        </p:spPr>
+        <p:style>
+          <a:lnRef idx="1">
+            <a:schemeClr val="accent1"/>
+          </a:lnRef>
+          <a:fillRef idx="3">
+            <a:schemeClr val="accent1"/>
+          </a:fillRef>
+          <a:effectRef idx="2">
+            <a:schemeClr val="accent1"/>
+          </a:effectRef>
+          <a:fontRef idx="minor">
+            <a:schemeClr val="lt1"/>
+          </a:fontRef>
+        </p:style>
+        <p:txBody>
+          <a:bodyPr rtlCol="0" anchor="ctr"/>
+          <a:lstStyle/>
+          <a:p>
+            <a:pPr algn="ctr"/>
+            <a:endParaRPr lang="en-US"/>
+          </a:p>
+        </p:txBody>
+      </p:sp>
+      <p:cxnSp>
+        <p:nvCxnSpPr>
+          <p:cNvPr id="19" name="Connector 18"/>
+          <p:cNvCxnSpPr/>
+          <p:nvPr/>
+        </p:nvCxnSpPr>
+        <p:spPr>
+          <a:xfrm>
+            <a:off x="554398" y="1352135"/>
+            <a:ext cx="586654" cy="0"/>
+          </a:xfrm>
+          <a:prstGeom prst="line">
+            <a:avLst/>
+          </a:prstGeom>
+          <a:ln w="9525">
+            <a:solidFill>
+              <a:srgbClr val="A78BFA"/>
+            </a:solidFill>
+          </a:ln>
+        </p:spPr>
+        <p:style>
+          <a:lnRef idx="2">
+            <a:schemeClr val="accent1"/>
+          </a:lnRef>
+          <a:fillRef idx="0">
+            <a:schemeClr val="accent1"/>
+          </a:fillRef>
+          <a:effectRef idx="1">
+            <a:schemeClr val="accent1"/>
+          </a:effectRef>
+          <a:fontRef idx="minor">
+            <a:schemeClr val="tx1"/>
+          </a:fontRef>
+        </p:style>
+      </p:cxnSp>
+      <p:cxnSp>
+        <p:nvCxnSpPr>
+          <p:cNvPr id="20" name="Connector 19"/>
+          <p:cNvCxnSpPr/>
+          <p:nvPr/>
+        </p:nvCxnSpPr>
+        <p:spPr>
+          <a:xfrm>
+            <a:off x="847725" y="1058808"/>
+            <a:ext cx="0" cy="586653"/>
+          </a:xfrm>
+          <a:prstGeom prst="line">
+            <a:avLst/>
+          </a:prstGeom>
+          <a:ln w="9525">
+            <a:solidFill>
+              <a:srgbClr val="A78BFA"/>
+            </a:solidFill>
+          </a:ln>
+        </p:spPr>
+        <p:style>
+          <a:lnRef idx="2">
+            <a:schemeClr val="accent1"/>
+          </a:lnRef>
+          <a:fillRef idx="0">
+            <a:schemeClr val="accent1"/>
+          </a:fillRef>
+          <a:effectRef idx="1">
+            <a:schemeClr val="accent1"/>
+          </a:effectRef>
+          <a:fontRef idx="minor">
+            <a:schemeClr val="tx1"/>
+          </a:fontRef>
+        </p:style>
+      </p:cxnSp>
+      <p:sp>
+        <p:nvSpPr>
+          <p:cNvPr id="21" name="TextBox 20"/>
+          <p:cNvSpPr txBox="1"/>
+          <p:nvPr/>
+        </p:nvSpPr>
+        <p:spPr>
+          <a:xfrm>
+            <a:off x="2690961" y="3102399"/>
+            <a:ext cx="1728788" cy="261938"/>
+          </a:xfrm>
+          <a:prstGeom prst="rect">
+            <a:avLst/>
+          </a:prstGeom>
+          <a:noFill/>
+        </p:spPr>
+        <p:txBody>
+          <a:bodyPr wrap="none" lIns="0" rIns="0" tIns="0" bIns="0">
+            <a:spAutoFit/>
+          </a:bodyPr>
+          <a:lstStyle/>
+          <a:p>
+            <a:pPr algn="ctr"/>
+            <a:r>
+              <a:rPr sz="1650" b="1" i="0">
                 <a:solidFill>
                   <a:srgbClr val="67E8F9"/>
                 </a:solidFill>
@@ -17239,29 +17757,29 @@
       </p:sp>
       <p:sp>
         <p:nvSpPr>
-          <p:cNvPr id="9" name="TextBox 8"/>
-          <p:cNvSpPr txBox="1"/>
-          <p:nvPr/>
-        </p:nvSpPr>
-        <p:spPr>
-          <a:xfrm>
-            <a:off x="2204913" y="4227509"/>
-            <a:ext cx="898689" cy="142875"/>
-          </a:xfrm>
-          <a:prstGeom prst="rect">
-            <a:avLst/>
-          </a:prstGeom>
-          <a:noFill/>
-        </p:spPr>
-        <p:txBody>
-          <a:bodyPr wrap="none" lIns="0" rIns="0" tIns="0" bIns="0">
-            <a:spAutoFit/>
-          </a:bodyPr>
-          <a:lstStyle/>
-          <a:p>
-            <a:pPr algn="l"/>
-            <a:r>
-              <a:rPr sz="825" b="1" i="0" u="none">
+          <p:cNvPr id="22" name="TextBox 21"/>
+          <p:cNvSpPr txBox="1"/>
+          <p:nvPr/>
+        </p:nvSpPr>
+        <p:spPr>
+          <a:xfrm>
+            <a:off x="2278241" y="4257989"/>
+            <a:ext cx="749141" cy="130969"/>
+          </a:xfrm>
+          <a:prstGeom prst="rect">
+            <a:avLst/>
+          </a:prstGeom>
+          <a:noFill/>
+        </p:spPr>
+        <p:txBody>
+          <a:bodyPr wrap="none" lIns="0" rIns="0" tIns="0" bIns="0">
+            <a:spAutoFit/>
+          </a:bodyPr>
+          <a:lstStyle/>
+          <a:p>
+            <a:pPr algn="ctr"/>
+            <a:r>
+              <a:rPr sz="825" b="1" i="0">
                 <a:solidFill>
                   <a:srgbClr val="67E8F9"/>
                 </a:solidFill>
@@ -17274,29 +17792,29 @@
       </p:sp>
       <p:sp>
         <p:nvSpPr>
-          <p:cNvPr id="10" name="TextBox 9"/>
-          <p:cNvSpPr txBox="1"/>
-          <p:nvPr/>
-        </p:nvSpPr>
-        <p:spPr>
-          <a:xfrm>
-            <a:off x="3336577" y="1598852"/>
-            <a:ext cx="443140" cy="142875"/>
-          </a:xfrm>
-          <a:prstGeom prst="rect">
-            <a:avLst/>
-          </a:prstGeom>
-          <a:noFill/>
-        </p:spPr>
-        <p:txBody>
-          <a:bodyPr wrap="none" lIns="0" rIns="0" tIns="0" bIns="0">
-            <a:spAutoFit/>
-          </a:bodyPr>
-          <a:lstStyle/>
-          <a:p>
-            <a:pPr algn="l"/>
-            <a:r>
-              <a:rPr sz="825" b="0" i="0" u="none">
+          <p:cNvPr id="23" name="TextBox 22"/>
+          <p:cNvSpPr txBox="1"/>
+          <p:nvPr/>
+        </p:nvSpPr>
+        <p:spPr>
+          <a:xfrm>
+            <a:off x="3353663" y="1629332"/>
+            <a:ext cx="403384" cy="130969"/>
+          </a:xfrm>
+          <a:prstGeom prst="rect">
+            <a:avLst/>
+          </a:prstGeom>
+          <a:noFill/>
+        </p:spPr>
+        <p:txBody>
+          <a:bodyPr wrap="none" lIns="0" rIns="0" tIns="0" bIns="0">
+            <a:spAutoFit/>
+          </a:bodyPr>
+          <a:lstStyle/>
+          <a:p>
+            <a:pPr algn="ctr"/>
+            <a:r>
+              <a:rPr sz="825" b="0" i="0">
                 <a:solidFill>
                   <a:srgbClr val="67E8F9"/>
                 </a:solidFill>
@@ -17309,29 +17827,29 @@
       </p:sp>
       <p:sp>
         <p:nvSpPr>
-          <p:cNvPr id="11" name="TextBox 10"/>
-          <p:cNvSpPr txBox="1"/>
-          <p:nvPr/>
-        </p:nvSpPr>
-        <p:spPr>
-          <a:xfrm>
-            <a:off x="959061" y="3189451"/>
-            <a:ext cx="142875" cy="381153"/>
-          </a:xfrm>
-          <a:prstGeom prst="rect">
-            <a:avLst/>
-          </a:prstGeom>
-          <a:noFill/>
-        </p:spPr>
-        <p:txBody>
-          <a:bodyPr wrap="square" lIns="0" rIns="0" tIns="0" bIns="0">
-            <a:spAutoFit/>
-          </a:bodyPr>
-          <a:lstStyle/>
-          <a:p>
-            <a:pPr algn="l"/>
-            <a:r>
-              <a:rPr sz="825" b="0" i="0" u="none">
+          <p:cNvPr id="24" name="TextBox 23"/>
+          <p:cNvSpPr txBox="1"/>
+          <p:nvPr/>
+        </p:nvSpPr>
+        <p:spPr>
+          <a:xfrm>
+            <a:off x="900482" y="3299037"/>
+            <a:ext cx="345758" cy="130969"/>
+          </a:xfrm>
+          <a:prstGeom prst="rect">
+            <a:avLst/>
+          </a:prstGeom>
+          <a:noFill/>
+        </p:spPr>
+        <p:txBody>
+          <a:bodyPr wrap="none" lIns="0" rIns="0" tIns="0" bIns="0">
+            <a:spAutoFit/>
+          </a:bodyPr>
+          <a:lstStyle/>
+          <a:p>
+            <a:pPr algn="ctr"/>
+            <a:r>
+              <a:rPr sz="825" b="0" i="0">
                 <a:solidFill>
                   <a:srgbClr val="67E8F9"/>
                 </a:solidFill>
@@ -17344,7 +17862,7 @@
       </p:sp>
       <p:sp>
         <p:nvSpPr>
-          <p:cNvPr id="12" name="TextBox 11"/>
+          <p:cNvPr id="25" name="TextBox 24"/>
           <p:cNvSpPr txBox="1"/>
           <p:nvPr/>
         </p:nvSpPr>
@@ -17374,7 +17892,7 @@
       </p:sp>
       <p:sp>
         <p:nvSpPr>
-          <p:cNvPr id="13" name="TextBox 12"/>
+          <p:cNvPr id="26" name="TextBox 25"/>
           <p:cNvSpPr txBox="1"/>
           <p:nvPr/>
         </p:nvSpPr>
@@ -17409,7 +17927,7 @@
       </p:sp>
       <p:sp>
         <p:nvSpPr>
-          <p:cNvPr id="14" name="TextBox 13"/>
+          <p:cNvPr id="27" name="TextBox 26"/>
           <p:cNvSpPr txBox="1"/>
           <p:nvPr/>
         </p:nvSpPr>
@@ -17444,7 +17962,7 @@
       </p:sp>
       <p:sp>
         <p:nvSpPr>
-          <p:cNvPr id="15" name="TextBox 14"/>
+          <p:cNvPr id="28" name="TextBox 27"/>
           <p:cNvSpPr txBox="1"/>
           <p:nvPr/>
         </p:nvSpPr>
@@ -17479,7 +17997,7 @@
       </p:sp>
       <p:sp>
         <p:nvSpPr>
-          <p:cNvPr id="16" name="TextBox 15"/>
+          <p:cNvPr id="29" name="TextBox 28"/>
           <p:cNvSpPr txBox="1"/>
           <p:nvPr/>
         </p:nvSpPr>
@@ -17514,7 +18032,7 @@
       </p:sp>
       <p:sp>
         <p:nvSpPr>
-          <p:cNvPr id="17" name="TextBox 16"/>
+          <p:cNvPr id="30" name="TextBox 29"/>
           <p:cNvSpPr txBox="1"/>
           <p:nvPr/>
         </p:nvSpPr>
@@ -17549,7 +18067,7 @@
       </p:sp>
       <p:sp>
         <p:nvSpPr>
-          <p:cNvPr id="18" name="TextBox 17"/>
+          <p:cNvPr id="31" name="TextBox 30"/>
           <p:cNvSpPr txBox="1"/>
           <p:nvPr/>
         </p:nvSpPr>
@@ -17584,7 +18102,7 @@
       </p:sp>
       <p:sp>
         <p:nvSpPr>
-          <p:cNvPr id="19" name="TextBox 18"/>
+          <p:cNvPr id="32" name="TextBox 31"/>
           <p:cNvSpPr txBox="1"/>
           <p:nvPr/>
         </p:nvSpPr>
@@ -17619,7 +18137,7 @@
       </p:sp>
       <p:sp>
         <p:nvSpPr>
-          <p:cNvPr id="20" name="TextBox 19"/>
+          <p:cNvPr id="33" name="TextBox 32"/>
           <p:cNvSpPr txBox="1"/>
           <p:nvPr/>
         </p:nvSpPr>
@@ -17649,7 +18167,7 @@
       </p:sp>
       <p:sp>
         <p:nvSpPr>
-          <p:cNvPr id="21" name="TextBox 20"/>
+          <p:cNvPr id="34" name="TextBox 33"/>
           <p:cNvSpPr txBox="1"/>
           <p:nvPr/>
         </p:nvSpPr>
@@ -17684,7 +18202,7 @@
       </p:sp>
       <p:sp>
         <p:nvSpPr>
-          <p:cNvPr id="22" name="TextBox 21"/>
+          <p:cNvPr id="35" name="TextBox 34"/>
           <p:cNvSpPr txBox="1"/>
           <p:nvPr/>
         </p:nvSpPr>
@@ -17719,7 +18237,7 @@
       </p:sp>
       <p:sp>
         <p:nvSpPr>
-          <p:cNvPr id="23" name="TextBox 22"/>
+          <p:cNvPr id="36" name="TextBox 35"/>
           <p:cNvSpPr txBox="1"/>
           <p:nvPr/>
         </p:nvSpPr>
@@ -17754,7 +18272,7 @@
       </p:sp>
       <p:sp>
         <p:nvSpPr>
-          <p:cNvPr id="24" name="TextBox 23"/>
+          <p:cNvPr id="37" name="TextBox 36"/>
           <p:cNvSpPr txBox="1"/>
           <p:nvPr/>
         </p:nvSpPr>
@@ -17789,7 +18307,7 @@
       </p:sp>
       <p:sp>
         <p:nvSpPr>
-          <p:cNvPr id="25" name="TextBox 24"/>
+          <p:cNvPr id="38" name="TextBox 37"/>
           <p:cNvSpPr txBox="1"/>
           <p:nvPr/>
         </p:nvSpPr>
@@ -17824,7 +18342,7 @@
       </p:sp>
       <p:sp>
         <p:nvSpPr>
-          <p:cNvPr id="26" name="TextBox 25"/>
+          <p:cNvPr id="39" name="TextBox 38"/>
           <p:cNvSpPr txBox="1"/>
           <p:nvPr/>
         </p:nvSpPr>
@@ -17859,7 +18377,7 @@
       </p:sp>
       <p:sp>
         <p:nvSpPr>
-          <p:cNvPr id="27" name="TextBox 26"/>
+          <p:cNvPr id="40" name="TextBox 39"/>
           <p:cNvSpPr txBox="1"/>
           <p:nvPr/>
         </p:nvSpPr>
@@ -17894,7 +18412,7 @@
       </p:sp>
       <p:sp>
         <p:nvSpPr>
-          <p:cNvPr id="28" name="TextBox 27"/>
+          <p:cNvPr id="41" name="TextBox 40"/>
           <p:cNvSpPr txBox="1"/>
           <p:nvPr/>
         </p:nvSpPr>
@@ -17924,7 +18442,7 @@
       </p:sp>
       <p:sp>
         <p:nvSpPr>
-          <p:cNvPr id="29" name="TextBox 28"/>
+          <p:cNvPr id="42" name="TextBox 41"/>
           <p:cNvSpPr txBox="1"/>
           <p:nvPr/>
         </p:nvSpPr>
@@ -17959,7 +18477,7 @@
       </p:sp>
       <p:sp>
         <p:nvSpPr>
-          <p:cNvPr id="30" name="TextBox 29"/>
+          <p:cNvPr id="43" name="TextBox 42"/>
           <p:cNvSpPr txBox="1"/>
           <p:nvPr/>
         </p:nvSpPr>
@@ -17994,7 +18512,7 @@
       </p:sp>
       <p:sp>
         <p:nvSpPr>
-          <p:cNvPr id="31" name="TextBox 30"/>
+          <p:cNvPr id="44" name="TextBox 43"/>
           <p:cNvSpPr txBox="1"/>
           <p:nvPr/>
         </p:nvSpPr>
@@ -18029,7 +18547,7 @@
       </p:sp>
       <p:sp>
         <p:nvSpPr>
-          <p:cNvPr id="32" name="TextBox 31"/>
+          <p:cNvPr id="45" name="TextBox 44"/>
           <p:cNvSpPr txBox="1"/>
           <p:nvPr/>
         </p:nvSpPr>
@@ -18064,7 +18582,7 @@
       </p:sp>
       <p:sp>
         <p:nvSpPr>
-          <p:cNvPr id="33" name="TextBox 32"/>
+          <p:cNvPr id="46" name="TextBox 45"/>
           <p:cNvSpPr txBox="1"/>
           <p:nvPr/>
         </p:nvSpPr>
@@ -18099,7 +18617,7 @@
       </p:sp>
       <p:sp>
         <p:nvSpPr>
-          <p:cNvPr id="34" name="TextBox 33"/>
+          <p:cNvPr id="47" name="TextBox 46"/>
           <p:cNvSpPr txBox="1"/>
           <p:nvPr/>
         </p:nvSpPr>
@@ -18134,7 +18652,7 @@
       </p:sp>
       <p:sp>
         <p:nvSpPr>
-          <p:cNvPr id="35" name="TextBox 34"/>
+          <p:cNvPr id="48" name="TextBox 47"/>
           <p:cNvSpPr txBox="1"/>
           <p:nvPr/>
         </p:nvSpPr>
@@ -18169,7 +18687,7 @@
       </p:sp>
       <p:sp>
         <p:nvSpPr>
-          <p:cNvPr id="36" name="TextBox 35"/>
+          <p:cNvPr id="49" name="TextBox 48"/>
           <p:cNvSpPr txBox="1"/>
           <p:nvPr/>
         </p:nvSpPr>
@@ -18204,7 +18722,7 @@
       </p:sp>
       <p:sp>
         <p:nvSpPr>
-          <p:cNvPr id="37" name="TextBox 36"/>
+          <p:cNvPr id="50" name="TextBox 49"/>
           <p:cNvSpPr txBox="1"/>
           <p:nvPr/>
         </p:nvSpPr>
